--- a/军民融合/ppt/图2(改).pptx
+++ b/军民融合/ppt/图2(改).pptx
@@ -489,7 +489,7 @@
           <a:p>
             <a:fld id="{EAD68A4E-1AD5-4525-8412-8CB756C9DD23}" type="datetimeFigureOut">
               <a:rPr lang="zh-CN" altLang="en-US"/>
-              <a:t>2026/6/23</a:t>
+              <a:t>2026/6/24</a:t>
             </a:fld>
             <a:endParaRPr/>
           </a:p>
@@ -656,7 +656,7 @@
           <a:p>
             <a:fld id="{EAD68A4E-1AD5-4525-8412-8CB756C9DD23}" type="datetimeFigureOut">
               <a:rPr lang="zh-CN" altLang="en-US"/>
-              <a:t>2026/6/23</a:t>
+              <a:t>2026/6/24</a:t>
             </a:fld>
             <a:endParaRPr/>
           </a:p>
@@ -833,7 +833,7 @@
           <a:p>
             <a:fld id="{EAD68A4E-1AD5-4525-8412-8CB756C9DD23}" type="datetimeFigureOut">
               <a:rPr lang="zh-CN" altLang="en-US"/>
-              <a:t>2026/6/23</a:t>
+              <a:t>2026/6/24</a:t>
             </a:fld>
             <a:endParaRPr/>
           </a:p>
@@ -1000,7 +1000,7 @@
           <a:p>
             <a:fld id="{EAD68A4E-1AD5-4525-8412-8CB756C9DD23}" type="datetimeFigureOut">
               <a:rPr lang="zh-CN" altLang="en-US"/>
-              <a:t>2026/6/23</a:t>
+              <a:t>2026/6/24</a:t>
             </a:fld>
             <a:endParaRPr/>
           </a:p>
@@ -1241,7 +1241,7 @@
           <a:p>
             <a:fld id="{EAD68A4E-1AD5-4525-8412-8CB756C9DD23}" type="datetimeFigureOut">
               <a:rPr lang="zh-CN" altLang="en-US"/>
-              <a:t>2026/6/23</a:t>
+              <a:t>2026/6/24</a:t>
             </a:fld>
             <a:endParaRPr/>
           </a:p>
@@ -1474,7 +1474,7 @@
           <a:p>
             <a:fld id="{EAD68A4E-1AD5-4525-8412-8CB756C9DD23}" type="datetimeFigureOut">
               <a:rPr lang="zh-CN" altLang="en-US"/>
-              <a:t>2026/6/23</a:t>
+              <a:t>2026/6/24</a:t>
             </a:fld>
             <a:endParaRPr/>
           </a:p>
@@ -1844,7 +1844,7 @@
           <a:p>
             <a:fld id="{EAD68A4E-1AD5-4525-8412-8CB756C9DD23}" type="datetimeFigureOut">
               <a:rPr lang="zh-CN" altLang="en-US"/>
-              <a:t>2026/6/23</a:t>
+              <a:t>2026/6/24</a:t>
             </a:fld>
             <a:endParaRPr/>
           </a:p>
@@ -1955,7 +1955,7 @@
           <a:p>
             <a:fld id="{EAD68A4E-1AD5-4525-8412-8CB756C9DD23}" type="datetimeFigureOut">
               <a:rPr lang="zh-CN" altLang="en-US"/>
-              <a:t>2026/6/23</a:t>
+              <a:t>2026/6/24</a:t>
             </a:fld>
             <a:endParaRPr/>
           </a:p>
@@ -2045,7 +2045,7 @@
           <a:p>
             <a:fld id="{EAD68A4E-1AD5-4525-8412-8CB756C9DD23}" type="datetimeFigureOut">
               <a:rPr lang="zh-CN" altLang="en-US"/>
-              <a:t>2026/6/23</a:t>
+              <a:t>2026/6/24</a:t>
             </a:fld>
             <a:endParaRPr/>
           </a:p>
@@ -2330,7 +2330,7 @@
           <a:p>
             <a:fld id="{EAD68A4E-1AD5-4525-8412-8CB756C9DD23}" type="datetimeFigureOut">
               <a:rPr lang="zh-CN" altLang="en-US"/>
-              <a:t>2026/6/23</a:t>
+              <a:t>2026/6/24</a:t>
             </a:fld>
             <a:endParaRPr/>
           </a:p>
@@ -2578,7 +2578,7 @@
           <a:p>
             <a:fld id="{EAD68A4E-1AD5-4525-8412-8CB756C9DD23}" type="datetimeFigureOut">
               <a:rPr lang="zh-CN" altLang="en-US"/>
-              <a:t>2026/6/23</a:t>
+              <a:t>2026/6/24</a:t>
             </a:fld>
             <a:endParaRPr/>
           </a:p>
@@ -2789,7 +2789,7 @@
           <a:p>
             <a:fld id="{EAD68A4E-1AD5-4525-8412-8CB756C9DD23}" type="datetimeFigureOut">
               <a:rPr lang="zh-CN" altLang="en-US"/>
-              <a:t>2026/6/23</a:t>
+              <a:t>2026/6/24</a:t>
             </a:fld>
             <a:endParaRPr/>
           </a:p>

--- a/军民融合/ppt/图2(改).pptx
+++ b/军民融合/ppt/图2(改).pptx
@@ -3648,7 +3648,7 @@
                 <a:ea typeface="微软雅黑" panose="020B0503020204020204" pitchFamily="34" charset="-122"/>
                 <a:sym typeface="+mn-ea"/>
               </a:rPr>
-              <a:t>怎么快速决策？</a:t>
+              <a:t>怎么协同决策？</a:t>
             </a:r>
           </a:p>
         </p:txBody>
@@ -8771,10 +8771,10 @@
         </p:nvGrpSpPr>
         <p:grpSpPr>
           <a:xfrm>
-            <a:off x="3052707" y="6447055"/>
-            <a:ext cx="5187752" cy="461665"/>
-            <a:chOff x="3370952" y="6447055"/>
-            <a:chExt cx="5187752" cy="461665"/>
+            <a:off x="3052707" y="6510098"/>
+            <a:ext cx="5187752" cy="393935"/>
+            <a:chOff x="3370952" y="6510098"/>
+            <a:chExt cx="5187752" cy="393935"/>
           </a:xfrm>
         </p:grpSpPr>
         <p:grpSp>
@@ -8791,10 +8791,10 @@
           </p:nvGrpSpPr>
           <p:grpSpPr>
             <a:xfrm>
-              <a:off x="3370952" y="6447055"/>
-              <a:ext cx="5187752" cy="461665"/>
-              <a:chOff x="3370952" y="6447055"/>
-              <a:chExt cx="5187752" cy="461665"/>
+              <a:off x="3370952" y="6510098"/>
+              <a:ext cx="5187752" cy="393935"/>
+              <a:chOff x="3370952" y="6510098"/>
+              <a:chExt cx="5187752" cy="393935"/>
             </a:xfrm>
           </p:grpSpPr>
           <p:sp>
@@ -8945,8 +8945,8 @@
             </p:nvSpPr>
             <p:spPr>
               <a:xfrm>
-                <a:off x="6836316" y="6447055"/>
-                <a:ext cx="1722388" cy="461665"/>
+                <a:off x="6836316" y="6510098"/>
+                <a:ext cx="1722388" cy="360099"/>
               </a:xfrm>
               <a:prstGeom prst="rect">
                 <a:avLst/>
@@ -8957,27 +8957,28 @@
               <a:bodyPr wrap="square" rtlCol="0">
                 <a:spAutoFit/>
               </a:bodyPr>
-              <a:lstStyle/>
-              <a:p>
-                <a:pPr algn="ctr"/>
-                <a:r>
-                  <a:rPr lang="zh-CN" altLang="en-US" sz="2400" b="1" dirty="0">
+              <a:lstStyle>
+                <a:defPPr>
+                  <a:defRPr lang="en-US"/>
+                </a:defPPr>
+                <a:lvl1pPr algn="ctr">
+                  <a:defRPr sz="1740" b="1">
                     <a:solidFill>
-                      <a:srgbClr val="C00000"/>
+                      <a:srgbClr val="2E54A1"/>
                     </a:solidFill>
                     <a:latin typeface="微软雅黑" panose="020B0503020204020204" pitchFamily="34" charset="-122"/>
                     <a:ea typeface="微软雅黑" panose="020B0503020204020204" pitchFamily="34" charset="-122"/>
+                  </a:defRPr>
+                </a:lvl1pPr>
+              </a:lstStyle>
+              <a:p>
+                <a:r>
+                  <a:rPr lang="zh-CN" altLang="en-US" dirty="0">
                     <a:sym typeface="+mn-ea"/>
                   </a:rPr>
                   <a:t>态势</a:t>
                 </a:r>
-                <a:endParaRPr lang="zh-CN" altLang="en-US" sz="2400" b="1" dirty="0">
-                  <a:solidFill>
-                    <a:srgbClr val="C00000"/>
-                  </a:solidFill>
-                  <a:latin typeface="微软雅黑" panose="020B0503020204020204" pitchFamily="34" charset="-122"/>
-                  <a:ea typeface="微软雅黑" panose="020B0503020204020204" pitchFamily="34" charset="-122"/>
-                </a:endParaRPr>
+                <a:endParaRPr lang="zh-CN" altLang="en-US" dirty="0"/>
               </a:p>
             </p:txBody>
           </p:sp>
@@ -9089,12 +9090,12 @@
             <a:gradFill>
               <a:gsLst>
                 <a:gs pos="100000">
-                  <a:srgbClr val="C00000">
-                    <a:alpha val="39000"/>
+                  <a:srgbClr val="2E54A1">
+                    <a:alpha val="54000"/>
                   </a:srgbClr>
                 </a:gs>
                 <a:gs pos="5000">
-                  <a:srgbClr val="C00000">
+                  <a:srgbClr val="7F9EDB">
                     <a:alpha val="0"/>
                   </a:srgbClr>
                 </a:gs>
@@ -9125,35 +9126,13 @@
             <a:bodyPr rtlCol="0" anchor="ctr"/>
             <a:lstStyle/>
             <a:p>
-              <a:pPr marL="0" marR="0" lvl="0" indent="0" algn="ctr" defTabSz="914400" rtl="0" eaLnBrk="1" fontAlgn="auto" latinLnBrk="0" hangingPunct="1">
-                <a:lnSpc>
-                  <a:spcPct val="100000"/>
-                </a:lnSpc>
-                <a:spcBef>
-                  <a:spcPts val="0"/>
-                </a:spcBef>
-                <a:spcAft>
-                  <a:spcPts val="0"/>
-                </a:spcAft>
-                <a:buClrTx/>
-                <a:buSzTx/>
-                <a:buFontTx/>
-                <a:buNone/>
-                <a:defRPr/>
-              </a:pPr>
-              <a:endParaRPr kumimoji="0" lang="zh-CN" altLang="en-US" sz="2235" b="0" i="0" u="none" strike="noStrike" kern="1200" cap="none" spc="0" normalizeH="0" baseline="0" noProof="0" dirty="0">
-                <a:ln>
-                  <a:noFill/>
-                </a:ln>
+              <a:pPr algn="ctr" rtl="0"/>
+              <a:endParaRPr lang="zh-CN" altLang="en-US" sz="2235" dirty="0">
                 <a:solidFill>
-                  <a:srgbClr val="C00000"/>
+                  <a:prstClr val="white"/>
                 </a:solidFill>
-                <a:effectLst/>
-                <a:uLnTx/>
-                <a:uFillTx/>
                 <a:latin typeface="等线" panose="02010600030101010101" charset="-122"/>
                 <a:ea typeface="等线" panose="02010600030101010101" charset="-122"/>
-                <a:cs typeface="+mn-cs"/>
               </a:endParaRPr>
             </a:p>
           </p:txBody>
